--- a/media/resources/files/Ekvivalenettuuluk_BOP_JenilOrtoOor_APO82yl.pptx
+++ b/media/resources/files/Ekvivalenettuuluk_BOP_JenilOrtoOor_APO82yl.pptx
@@ -16122,7 +16122,7 @@
                 <a:ea typeface="+mn-ea"/>
                 <a:cs typeface="+mn-cs"/>
               </a:rPr>
-              <a:t>Турдуу пикирлер учун ыраазычылык билдиребиз.</a:t>
+              <a:t>Түрдүү пикирлер үчүн ыраазычылык билдиребиз.</a:t>
             </a:r>
           </a:p>
           <a:p>

--- a/media/resources/files/Ekvivalenettuuluk_BOP_JenilOrtoOor_APO82yl.pptx
+++ b/media/resources/files/Ekvivalenettuuluk_BOP_JenilOrtoOor_APO82yl.pptx
@@ -2173,7 +2173,7 @@
                                 <a:sysClr val="windowText" lastClr="000000"/>
                               </a:solidFill>
                             </a:rPr>
-                            <a:t>0.44</a:t>
+                            <a:t>0,44</a:t>
                           </a:r>
                         </a:p>
                       </a:txBody>
@@ -2623,7 +2623,7 @@
                                 <a:sysClr val="windowText" lastClr="000000"/>
                               </a:solidFill>
                             </a:rPr>
-                            <a:t>0.125</a:t>
+                            <a:t>0,125</a:t>
                           </a:r>
                         </a:p>
                       </a:txBody>
@@ -3913,7 +3913,7 @@
                                 <a:sysClr val="windowText" lastClr="000000"/>
                               </a:solidFill>
                             </a:rPr>
-                            <a:t>0.44</a:t>
+                            <a:t>0,44</a:t>
                           </a:r>
                         </a:p>
                       </a:txBody>
@@ -4363,7 +4363,7 @@
                                 <a:sysClr val="windowText" lastClr="000000"/>
                               </a:solidFill>
                             </a:rPr>
-                            <a:t>0.125</a:t>
+                            <a:t>0,125</a:t>
                           </a:r>
                         </a:p>
                       </a:txBody>
@@ -5365,7 +5365,7 @@
           <a:p>
             <a:r>
               <a:rPr lang="en-GB" sz="2000" dirty="0"/>
-              <a:t>0.8 </a:t>
+              <a:t>0,8 </a:t>
             </a:r>
             <a:r>
               <a:rPr lang="ky-KG" sz="2000" dirty="0"/>
@@ -5748,7 +5748,7 @@
           <a:p>
             <a:r>
               <a:rPr lang="en-GB" sz="2000" dirty="0"/>
-              <a:t>0.06 </a:t>
+              <a:t>0,06 </a:t>
             </a:r>
             <a:r>
               <a:rPr lang="ky-KG" sz="2000" dirty="0"/>
@@ -6155,7 +6155,7 @@
             <a:pPr algn="ctr"/>
             <a:r>
               <a:rPr lang="en-GB" sz="2000" dirty="0"/>
-              <a:t>0.009 </a:t>
+              <a:t>0,009 </a:t>
             </a:r>
             <a:r>
               <a:rPr lang="ky-KG" sz="2000" dirty="0"/>
@@ -6244,7 +6244,7 @@
             <a:pPr algn="ctr"/>
             <a:r>
               <a:rPr lang="en-GB" sz="2000" dirty="0"/>
-              <a:t>0.055 </a:t>
+              <a:t>0,055 </a:t>
             </a:r>
             <a:r>
               <a:rPr lang="ky-KG" sz="2000" dirty="0"/>
@@ -7445,7 +7445,7 @@
                                 <a:sysClr val="windowText" lastClr="000000"/>
                               </a:solidFill>
                             </a:rPr>
-                            <a:t>1.2</a:t>
+                            <a:t>1,2</a:t>
                           </a:r>
                         </a:p>
                       </a:txBody>
@@ -7740,7 +7740,7 @@
                                 <a:sysClr val="windowText" lastClr="000000"/>
                               </a:solidFill>
                             </a:rPr>
-                            <a:t>0.44</a:t>
+                            <a:t>0,44</a:t>
                           </a:r>
                         </a:p>
                       </a:txBody>
@@ -8035,7 +8035,7 @@
                                 <a:sysClr val="windowText" lastClr="000000"/>
                               </a:solidFill>
                             </a:rPr>
-                            <a:t>1.85</a:t>
+                            <a:t>1,85</a:t>
                           </a:r>
                         </a:p>
                       </a:txBody>
@@ -8330,7 +8330,7 @@
                                 <a:sysClr val="windowText" lastClr="000000"/>
                               </a:solidFill>
                             </a:rPr>
-                            <a:t>0.125</a:t>
+                            <a:t>0,125</a:t>
                           </a:r>
                         </a:p>
                       </a:txBody>
@@ -8418,7 +8418,7 @@
                                 <a:sysClr val="windowText" lastClr="000000"/>
                               </a:solidFill>
                             </a:rPr>
-                            <a:t>12.5%</a:t>
+                            <a:t>12,5%</a:t>
                           </a:r>
                         </a:p>
                       </a:txBody>
@@ -8625,7 +8625,7 @@
                                 <a:sysClr val="windowText" lastClr="000000"/>
                               </a:solidFill>
                             </a:rPr>
-                            <a:t>0.012</a:t>
+                            <a:t>0,012</a:t>
                           </a:r>
                         </a:p>
                       </a:txBody>
@@ -8713,7 +8713,7 @@
                                 <a:sysClr val="windowText" lastClr="000000"/>
                               </a:solidFill>
                             </a:rPr>
-                            <a:t>1.2%</a:t>
+                            <a:t>1,2%</a:t>
                           </a:r>
                         </a:p>
                       </a:txBody>
@@ -8916,7 +8916,7 @@
                                 <a:sysClr val="windowText" lastClr="000000"/>
                               </a:solidFill>
                             </a:rPr>
-                            <a:t>0.925</a:t>
+                            <a:t>0,925</a:t>
                           </a:r>
                         </a:p>
                       </a:txBody>
@@ -9000,7 +9000,7 @@
                                 <a:sysClr val="windowText" lastClr="000000"/>
                               </a:solidFill>
                             </a:rPr>
-                            <a:t>92.5%</a:t>
+                            <a:t>92,5%</a:t>
                           </a:r>
                         </a:p>
                       </a:txBody>
@@ -9413,7 +9413,7 @@
                                 <a:sysClr val="windowText" lastClr="000000"/>
                               </a:solidFill>
                             </a:rPr>
-                            <a:t>1.2</a:t>
+                            <a:t>1,2</a:t>
                           </a:r>
                         </a:p>
                       </a:txBody>
@@ -9641,7 +9641,7 @@
                                 <a:sysClr val="windowText" lastClr="000000"/>
                               </a:solidFill>
                             </a:rPr>
-                            <a:t>0.44</a:t>
+                            <a:t>0,44</a:t>
                           </a:r>
                         </a:p>
                       </a:txBody>
@@ -9869,7 +9869,7 @@
                                 <a:sysClr val="windowText" lastClr="000000"/>
                               </a:solidFill>
                             </a:rPr>
-                            <a:t>1.85</a:t>
+                            <a:t>1,85</a:t>
                           </a:r>
                         </a:p>
                       </a:txBody>
@@ -10097,7 +10097,7 @@
                                 <a:sysClr val="windowText" lastClr="000000"/>
                               </a:solidFill>
                             </a:rPr>
-                            <a:t>0.125</a:t>
+                            <a:t>0,125</a:t>
                           </a:r>
                         </a:p>
                       </a:txBody>
@@ -10185,7 +10185,7 @@
                                 <a:sysClr val="windowText" lastClr="000000"/>
                               </a:solidFill>
                             </a:rPr>
-                            <a:t>12.5%</a:t>
+                            <a:t>12,5%</a:t>
                           </a:r>
                         </a:p>
                       </a:txBody>
@@ -10325,7 +10325,7 @@
                                 <a:sysClr val="windowText" lastClr="000000"/>
                               </a:solidFill>
                             </a:rPr>
-                            <a:t>0.012</a:t>
+                            <a:t>0,012</a:t>
                           </a:r>
                         </a:p>
                       </a:txBody>
@@ -10413,7 +10413,7 @@
                                 <a:sysClr val="windowText" lastClr="000000"/>
                               </a:solidFill>
                             </a:rPr>
-                            <a:t>1.2%</a:t>
+                            <a:t>1,2%</a:t>
                           </a:r>
                         </a:p>
                       </a:txBody>
@@ -10549,7 +10549,7 @@
                                 <a:sysClr val="windowText" lastClr="000000"/>
                               </a:solidFill>
                             </a:rPr>
-                            <a:t>0.925</a:t>
+                            <a:t>0,925</a:t>
                           </a:r>
                         </a:p>
                       </a:txBody>
@@ -10633,7 +10633,7 @@
                                 <a:sysClr val="windowText" lastClr="000000"/>
                               </a:solidFill>
                             </a:rPr>
-                            <a:t>92.5%</a:t>
+                            <a:t>92,5%</a:t>
                           </a:r>
                         </a:p>
                       </a:txBody>
@@ -10735,7 +10735,7 @@
             <a:pPr algn="just"/>
             <a:r>
               <a:rPr lang="en-GB" sz="2200" dirty="0"/>
-              <a:t>0.42</a:t>
+              <a:t>0,42</a:t>
             </a:r>
           </a:p>
         </p:txBody>
@@ -11331,7 +11331,7 @@
             <a:pPr algn="just"/>
             <a:r>
               <a:rPr lang="en-GB" sz="2200" dirty="0"/>
-              <a:t>0.34</a:t>
+              <a:t>0,34</a:t>
             </a:r>
           </a:p>
         </p:txBody>
@@ -11501,7 +11501,7 @@
             <a:pPr algn="just"/>
             <a:r>
               <a:rPr lang="en-GB" sz="2200" dirty="0"/>
-              <a:t>5.5%</a:t>
+              <a:t>5,5%</a:t>
             </a:r>
           </a:p>
         </p:txBody>
@@ -11544,7 +11544,7 @@
             <a:pPr algn="just"/>
             <a:r>
               <a:rPr lang="en-GB" sz="2200" dirty="0"/>
-              <a:t>0.333…</a:t>
+              <a:t>0,333…</a:t>
             </a:r>
           </a:p>
         </p:txBody>
@@ -12827,7 +12827,7 @@
           <a:p>
             <a:r>
               <a:rPr lang="en-GB" sz="2000" dirty="0"/>
-              <a:t>0.8 </a:t>
+              <a:t>0,8 </a:t>
             </a:r>
             <a:r>
               <a:rPr lang="ky-KG" sz="2000" dirty="0"/>
@@ -13210,7 +13210,7 @@
           <a:p>
             <a:r>
               <a:rPr lang="en-GB" sz="2000" dirty="0"/>
-              <a:t>0.06 </a:t>
+              <a:t>0,06 </a:t>
             </a:r>
             <a:r>
               <a:rPr lang="ky-KG" sz="2000" dirty="0"/>
@@ -13617,7 +13617,7 @@
             <a:pPr algn="ctr"/>
             <a:r>
               <a:rPr lang="en-GB" sz="2000" dirty="0"/>
-              <a:t>0.009 </a:t>
+              <a:t>0,009 </a:t>
             </a:r>
             <a:r>
               <a:rPr lang="ky-KG" sz="2000" dirty="0"/>
@@ -13706,7 +13706,7 @@
             <a:pPr algn="ctr"/>
             <a:r>
               <a:rPr lang="en-GB" sz="2000" dirty="0"/>
-              <a:t>0.055 </a:t>
+              <a:t>0,055 </a:t>
             </a:r>
             <a:r>
               <a:rPr lang="ky-KG" sz="2000" dirty="0"/>
